--- a/assets/powerpoints/module-consultation/C4-lire-une-ordonnance.pptx
+++ b/assets/powerpoints/module-consultation/C4-lire-une-ordonnance.pptx
@@ -4574,7 +4574,7 @@
             <a:r>
               <a:rPr sz="1300" b="1" i="0" spc="156">
                 <a:solidFill>
-                  <a:srgbClr val="166534"/>
+                  <a:srgbClr val="A5335F"/>
                 </a:solidFill>
                 <a:latin typeface="Verdana"/>
               </a:rPr>
@@ -4914,7 +4914,7 @@
             <a:r>
               <a:rPr sz="1300" b="1" i="0" spc="156">
                 <a:solidFill>
-                  <a:srgbClr val="166534"/>
+                  <a:srgbClr val="A5335F"/>
                 </a:solidFill>
                 <a:latin typeface="Verdana"/>
               </a:rPr>
@@ -5064,7 +5064,7 @@
             </a:avLst>
           </a:prstGeom>
           <a:solidFill>
-            <a:srgbClr val="E3F1E7"/>
+            <a:srgbClr val="FCE9F0"/>
           </a:solidFill>
           <a:ln>
             <a:noFill/>
@@ -5121,7 +5121,7 @@
             <a:r>
               <a:rPr sz="1500" b="1" i="0">
                 <a:solidFill>
-                  <a:srgbClr val="166534"/>
+                  <a:srgbClr val="A5335F"/>
                 </a:solidFill>
                 <a:latin typeface="Verdana"/>
               </a:rPr>
@@ -5241,7 +5241,7 @@
             </a:avLst>
           </a:prstGeom>
           <a:solidFill>
-            <a:srgbClr val="E3F1E7"/>
+            <a:srgbClr val="FCE9F0"/>
           </a:solidFill>
           <a:ln>
             <a:noFill/>
@@ -5298,7 +5298,7 @@
             <a:r>
               <a:rPr sz="1500" b="1" i="0">
                 <a:solidFill>
-                  <a:srgbClr val="166534"/>
+                  <a:srgbClr val="A5335F"/>
                 </a:solidFill>
                 <a:latin typeface="Verdana"/>
               </a:rPr>
@@ -5418,7 +5418,7 @@
             </a:avLst>
           </a:prstGeom>
           <a:solidFill>
-            <a:srgbClr val="E3F1E7"/>
+            <a:srgbClr val="FCE9F0"/>
           </a:solidFill>
           <a:ln>
             <a:noFill/>
@@ -5475,7 +5475,7 @@
             <a:r>
               <a:rPr sz="1500" b="1" i="0">
                 <a:solidFill>
-                  <a:srgbClr val="166534"/>
+                  <a:srgbClr val="A5335F"/>
                 </a:solidFill>
                 <a:latin typeface="Verdana"/>
               </a:rPr>
@@ -5595,7 +5595,7 @@
             </a:avLst>
           </a:prstGeom>
           <a:solidFill>
-            <a:srgbClr val="E3F1E7"/>
+            <a:srgbClr val="FCE9F0"/>
           </a:solidFill>
           <a:ln>
             <a:noFill/>
@@ -5652,7 +5652,7 @@
             <a:r>
               <a:rPr sz="1500" b="1" i="0">
                 <a:solidFill>
-                  <a:srgbClr val="166534"/>
+                  <a:srgbClr val="A5335F"/>
                 </a:solidFill>
                 <a:latin typeface="Verdana"/>
               </a:rPr>
@@ -5772,7 +5772,7 @@
             </a:avLst>
           </a:prstGeom>
           <a:solidFill>
-            <a:srgbClr val="E3F1E7"/>
+            <a:srgbClr val="FCE9F0"/>
           </a:solidFill>
           <a:ln>
             <a:noFill/>
@@ -5829,7 +5829,7 @@
             <a:r>
               <a:rPr sz="1500" b="1" i="0">
                 <a:solidFill>
-                  <a:srgbClr val="166534"/>
+                  <a:srgbClr val="A5335F"/>
                 </a:solidFill>
                 <a:latin typeface="Verdana"/>
               </a:rPr>
@@ -6054,7 +6054,7 @@
             <a:r>
               <a:rPr sz="1300" b="1" i="0" spc="156">
                 <a:solidFill>
-                  <a:srgbClr val="166534"/>
+                  <a:srgbClr val="A5335F"/>
                 </a:solidFill>
                 <a:latin typeface="Verdana"/>
               </a:rPr>
@@ -6603,7 +6603,7 @@
             <a:r>
               <a:rPr sz="1300" b="1" i="0" spc="156">
                 <a:solidFill>
-                  <a:srgbClr val="166534"/>
+                  <a:srgbClr val="A5335F"/>
                 </a:solidFill>
                 <a:latin typeface="Verdana"/>
               </a:rPr>
@@ -7152,7 +7152,7 @@
             <a:r>
               <a:rPr sz="1300" b="1" i="0" spc="156">
                 <a:solidFill>
-                  <a:srgbClr val="166534"/>
+                  <a:srgbClr val="A5335F"/>
                 </a:solidFill>
                 <a:latin typeface="Verdana"/>
               </a:rPr>
@@ -7302,7 +7302,7 @@
             </a:avLst>
           </a:prstGeom>
           <a:solidFill>
-            <a:srgbClr val="E3F1E7"/>
+            <a:srgbClr val="FCE9F0"/>
           </a:solidFill>
           <a:ln>
             <a:noFill/>
@@ -7359,7 +7359,7 @@
             <a:r>
               <a:rPr sz="1500" b="1" i="0">
                 <a:solidFill>
-                  <a:srgbClr val="166534"/>
+                  <a:srgbClr val="A5335F"/>
                 </a:solidFill>
                 <a:latin typeface="Verdana"/>
               </a:rPr>
@@ -7470,7 +7470,7 @@
             </a:avLst>
           </a:prstGeom>
           <a:solidFill>
-            <a:srgbClr val="E3F1E7"/>
+            <a:srgbClr val="FCE9F0"/>
           </a:solidFill>
           <a:ln>
             <a:noFill/>
@@ -7527,7 +7527,7 @@
             <a:r>
               <a:rPr sz="1500" b="1" i="0">
                 <a:solidFill>
-                  <a:srgbClr val="166534"/>
+                  <a:srgbClr val="A5335F"/>
                 </a:solidFill>
                 <a:latin typeface="Verdana"/>
               </a:rPr>
@@ -7638,7 +7638,7 @@
             </a:avLst>
           </a:prstGeom>
           <a:solidFill>
-            <a:srgbClr val="E3F1E7"/>
+            <a:srgbClr val="FCE9F0"/>
           </a:solidFill>
           <a:ln>
             <a:noFill/>
@@ -7695,7 +7695,7 @@
             <a:r>
               <a:rPr sz="1500" b="1" i="0">
                 <a:solidFill>
-                  <a:srgbClr val="166534"/>
+                  <a:srgbClr val="A5335F"/>
                 </a:solidFill>
                 <a:latin typeface="Verdana"/>
               </a:rPr>
@@ -7806,7 +7806,7 @@
             </a:avLst>
           </a:prstGeom>
           <a:solidFill>
-            <a:srgbClr val="E3F1E7"/>
+            <a:srgbClr val="FCE9F0"/>
           </a:solidFill>
           <a:ln>
             <a:noFill/>
@@ -7863,7 +7863,7 @@
             <a:r>
               <a:rPr sz="1500" b="1" i="0">
                 <a:solidFill>
-                  <a:srgbClr val="166534"/>
+                  <a:srgbClr val="A5335F"/>
                 </a:solidFill>
                 <a:latin typeface="Verdana"/>
               </a:rPr>
@@ -8079,7 +8079,7 @@
             <a:r>
               <a:rPr sz="1300" b="1" i="0" spc="156">
                 <a:solidFill>
-                  <a:srgbClr val="166534"/>
+                  <a:srgbClr val="A5335F"/>
                 </a:solidFill>
                 <a:latin typeface="Verdana"/>
               </a:rPr>
@@ -8229,7 +8229,7 @@
             </a:avLst>
           </a:prstGeom>
           <a:solidFill>
-            <a:srgbClr val="E3F1E7"/>
+            <a:srgbClr val="FCE9F0"/>
           </a:solidFill>
           <a:ln>
             <a:noFill/>
@@ -8286,7 +8286,7 @@
             <a:r>
               <a:rPr sz="1500" b="1" i="0">
                 <a:solidFill>
-                  <a:srgbClr val="166534"/>
+                  <a:srgbClr val="A5335F"/>
                 </a:solidFill>
                 <a:latin typeface="Verdana"/>
               </a:rPr>
@@ -8406,7 +8406,7 @@
             </a:avLst>
           </a:prstGeom>
           <a:solidFill>
-            <a:srgbClr val="E3F1E7"/>
+            <a:srgbClr val="FCE9F0"/>
           </a:solidFill>
           <a:ln>
             <a:noFill/>
@@ -8463,7 +8463,7 @@
             <a:r>
               <a:rPr sz="1500" b="1" i="0">
                 <a:solidFill>
-                  <a:srgbClr val="166534"/>
+                  <a:srgbClr val="A5335F"/>
                 </a:solidFill>
                 <a:latin typeface="Verdana"/>
               </a:rPr>
@@ -8583,7 +8583,7 @@
             </a:avLst>
           </a:prstGeom>
           <a:solidFill>
-            <a:srgbClr val="E3F1E7"/>
+            <a:srgbClr val="FCE9F0"/>
           </a:solidFill>
           <a:ln>
             <a:noFill/>
@@ -8640,7 +8640,7 @@
             <a:r>
               <a:rPr sz="1500" b="1" i="0">
                 <a:solidFill>
-                  <a:srgbClr val="166534"/>
+                  <a:srgbClr val="A5335F"/>
                 </a:solidFill>
                 <a:latin typeface="Verdana"/>
               </a:rPr>
@@ -8760,7 +8760,7 @@
             </a:avLst>
           </a:prstGeom>
           <a:solidFill>
-            <a:srgbClr val="E3F1E7"/>
+            <a:srgbClr val="FCE9F0"/>
           </a:solidFill>
           <a:ln>
             <a:noFill/>
@@ -8817,7 +8817,7 @@
             <a:r>
               <a:rPr sz="1500" b="1" i="0">
                 <a:solidFill>
-                  <a:srgbClr val="166534"/>
+                  <a:srgbClr val="A5335F"/>
                 </a:solidFill>
                 <a:latin typeface="Verdana"/>
               </a:rPr>
@@ -9505,7 +9505,7 @@
             <a:r>
               <a:rPr sz="1300" b="1" i="0" spc="156">
                 <a:solidFill>
-                  <a:srgbClr val="166534"/>
+                  <a:srgbClr val="A5335F"/>
                 </a:solidFill>
                 <a:latin typeface="Verdana"/>
               </a:rPr>
@@ -9616,7 +9616,7 @@
             </a:avLst>
           </a:prstGeom>
           <a:solidFill>
-            <a:srgbClr val="E3F1E7"/>
+            <a:srgbClr val="FCE9F0"/>
           </a:solidFill>
           <a:ln>
             <a:noFill/>
@@ -9673,7 +9673,7 @@
             <a:r>
               <a:rPr sz="1500" b="1" i="0">
                 <a:solidFill>
-                  <a:srgbClr val="166534"/>
+                  <a:srgbClr val="A5335F"/>
                 </a:solidFill>
                 <a:latin typeface="Verdana"/>
               </a:rPr>
@@ -9784,7 +9784,7 @@
             </a:avLst>
           </a:prstGeom>
           <a:solidFill>
-            <a:srgbClr val="E3F1E7"/>
+            <a:srgbClr val="FCE9F0"/>
           </a:solidFill>
           <a:ln>
             <a:noFill/>
@@ -9841,7 +9841,7 @@
             <a:r>
               <a:rPr sz="1500" b="1" i="0">
                 <a:solidFill>
-                  <a:srgbClr val="166534"/>
+                  <a:srgbClr val="A5335F"/>
                 </a:solidFill>
                 <a:latin typeface="Verdana"/>
               </a:rPr>
@@ -9952,7 +9952,7 @@
             </a:avLst>
           </a:prstGeom>
           <a:solidFill>
-            <a:srgbClr val="E3F1E7"/>
+            <a:srgbClr val="FCE9F0"/>
           </a:solidFill>
           <a:ln>
             <a:noFill/>
@@ -10009,7 +10009,7 @@
             <a:r>
               <a:rPr sz="1500" b="1" i="0">
                 <a:solidFill>
-                  <a:srgbClr val="166534"/>
+                  <a:srgbClr val="A5335F"/>
                 </a:solidFill>
                 <a:latin typeface="Verdana"/>
               </a:rPr>
@@ -10120,7 +10120,7 @@
             </a:avLst>
           </a:prstGeom>
           <a:solidFill>
-            <a:srgbClr val="E3F1E7"/>
+            <a:srgbClr val="FCE9F0"/>
           </a:solidFill>
           <a:ln>
             <a:noFill/>
@@ -10177,7 +10177,7 @@
             <a:r>
               <a:rPr sz="1500" b="1" i="0">
                 <a:solidFill>
-                  <a:srgbClr val="166534"/>
+                  <a:srgbClr val="A5335F"/>
                 </a:solidFill>
                 <a:latin typeface="Verdana"/>
               </a:rPr>
@@ -10393,7 +10393,7 @@
             <a:r>
               <a:rPr sz="1300" b="1" i="0" spc="156">
                 <a:solidFill>
-                  <a:srgbClr val="166534"/>
+                  <a:srgbClr val="A5335F"/>
                 </a:solidFill>
                 <a:latin typeface="Verdana"/>
               </a:rPr>
@@ -10595,7 +10595,7 @@
             <a:r>
               <a:rPr sz="1600" b="1" i="0">
                 <a:solidFill>
-                  <a:srgbClr val="166534"/>
+                  <a:srgbClr val="A5335F"/>
                 </a:solidFill>
                 <a:latin typeface="Verdana"/>
               </a:rPr>
@@ -10715,7 +10715,7 @@
             <a:r>
               <a:rPr sz="1600" b="1" i="0">
                 <a:solidFill>
-                  <a:srgbClr val="166534"/>
+                  <a:srgbClr val="A5335F"/>
                 </a:solidFill>
                 <a:latin typeface="Verdana"/>
               </a:rPr>
@@ -10835,7 +10835,7 @@
             <a:r>
               <a:rPr sz="1600" b="1" i="0">
                 <a:solidFill>
-                  <a:srgbClr val="166534"/>
+                  <a:srgbClr val="A5335F"/>
                 </a:solidFill>
                 <a:latin typeface="Verdana"/>
               </a:rPr>
@@ -10955,7 +10955,7 @@
             <a:r>
               <a:rPr sz="1600" b="1" i="0">
                 <a:solidFill>
-                  <a:srgbClr val="166534"/>
+                  <a:srgbClr val="A5335F"/>
                 </a:solidFill>
                 <a:latin typeface="Verdana"/>
               </a:rPr>
@@ -11075,7 +11075,7 @@
             <a:r>
               <a:rPr sz="1600" b="1" i="0">
                 <a:solidFill>
-                  <a:srgbClr val="166534"/>
+                  <a:srgbClr val="A5335F"/>
                 </a:solidFill>
                 <a:latin typeface="Verdana"/>
               </a:rPr>
@@ -11376,7 +11376,7 @@
             <a:r>
               <a:rPr sz="1300" b="1" i="0" spc="156">
                 <a:solidFill>
-                  <a:srgbClr val="166534"/>
+                  <a:srgbClr val="A5335F"/>
                 </a:solidFill>
                 <a:latin typeface="Verdana"/>
               </a:rPr>
@@ -11402,7 +11402,7 @@
             </a:avLst>
           </a:prstGeom>
           <a:solidFill>
-            <a:srgbClr val="E3F1E7"/>
+            <a:srgbClr val="FCE9F0"/>
           </a:solidFill>
           <a:ln w="12700">
             <a:solidFill>
@@ -11723,7 +11723,7 @@
             <a:r>
               <a:rPr sz="1300" b="1" i="0" spc="156">
                 <a:solidFill>
-                  <a:srgbClr val="166534"/>
+                  <a:srgbClr val="A5335F"/>
                 </a:solidFill>
                 <a:latin typeface="Verdana"/>
               </a:rPr>
@@ -11847,7 +11847,7 @@
             <a:r>
               <a:rPr sz="2100" b="1" i="0">
                 <a:solidFill>
-                  <a:srgbClr val="166534"/>
+                  <a:srgbClr val="A5335F"/>
                 </a:solidFill>
                 <a:latin typeface="Verdana"/>
               </a:rPr>
@@ -11971,7 +11971,7 @@
             <a:r>
               <a:rPr sz="2100" b="1" i="0">
                 <a:solidFill>
-                  <a:srgbClr val="166534"/>
+                  <a:srgbClr val="A5335F"/>
                 </a:solidFill>
                 <a:latin typeface="Verdana"/>
               </a:rPr>
@@ -12095,7 +12095,7 @@
             <a:r>
               <a:rPr sz="2100" b="1" i="0">
                 <a:solidFill>
-                  <a:srgbClr val="166534"/>
+                  <a:srgbClr val="A5335F"/>
                 </a:solidFill>
                 <a:latin typeface="Verdana"/>
               </a:rPr>
@@ -12219,7 +12219,7 @@
             <a:r>
               <a:rPr sz="2100" b="1" i="0">
                 <a:solidFill>
-                  <a:srgbClr val="166534"/>
+                  <a:srgbClr val="A5335F"/>
                 </a:solidFill>
                 <a:latin typeface="Verdana"/>
               </a:rPr>
@@ -12435,7 +12435,7 @@
             <a:r>
               <a:rPr sz="1300" b="1" i="0" spc="156">
                 <a:solidFill>
-                  <a:srgbClr val="166534"/>
+                  <a:srgbClr val="A5335F"/>
                 </a:solidFill>
                 <a:latin typeface="Verdana"/>
               </a:rPr>
@@ -13375,7 +13375,7 @@
             <a:r>
               <a:rPr sz="1300" b="1" i="0" spc="156">
                 <a:solidFill>
-                  <a:srgbClr val="166534"/>
+                  <a:srgbClr val="A5335F"/>
                 </a:solidFill>
                 <a:latin typeface="Verdana"/>
               </a:rPr>
@@ -13525,7 +13525,7 @@
             </a:avLst>
           </a:prstGeom>
           <a:solidFill>
-            <a:srgbClr val="E3F1E7"/>
+            <a:srgbClr val="FCE9F0"/>
           </a:solidFill>
           <a:ln>
             <a:noFill/>
@@ -13582,7 +13582,7 @@
             <a:r>
               <a:rPr sz="1500" b="1" i="0">
                 <a:solidFill>
-                  <a:srgbClr val="166534"/>
+                  <a:srgbClr val="A5335F"/>
                 </a:solidFill>
                 <a:latin typeface="Verdana"/>
               </a:rPr>
@@ -13693,7 +13693,7 @@
             </a:avLst>
           </a:prstGeom>
           <a:solidFill>
-            <a:srgbClr val="E3F1E7"/>
+            <a:srgbClr val="FCE9F0"/>
           </a:solidFill>
           <a:ln>
             <a:noFill/>
@@ -13750,7 +13750,7 @@
             <a:r>
               <a:rPr sz="1500" b="1" i="0">
                 <a:solidFill>
-                  <a:srgbClr val="166534"/>
+                  <a:srgbClr val="A5335F"/>
                 </a:solidFill>
                 <a:latin typeface="Verdana"/>
               </a:rPr>
@@ -13861,7 +13861,7 @@
             </a:avLst>
           </a:prstGeom>
           <a:solidFill>
-            <a:srgbClr val="E3F1E7"/>
+            <a:srgbClr val="FCE9F0"/>
           </a:solidFill>
           <a:ln>
             <a:noFill/>
@@ -13918,7 +13918,7 @@
             <a:r>
               <a:rPr sz="1500" b="1" i="0">
                 <a:solidFill>
-                  <a:srgbClr val="166534"/>
+                  <a:srgbClr val="A5335F"/>
                 </a:solidFill>
                 <a:latin typeface="Verdana"/>
               </a:rPr>
@@ -14029,7 +14029,7 @@
             </a:avLst>
           </a:prstGeom>
           <a:solidFill>
-            <a:srgbClr val="E3F1E7"/>
+            <a:srgbClr val="FCE9F0"/>
           </a:solidFill>
           <a:ln>
             <a:noFill/>
@@ -14086,7 +14086,7 @@
             <a:r>
               <a:rPr sz="1500" b="1" i="0">
                 <a:solidFill>
-                  <a:srgbClr val="166534"/>
+                  <a:srgbClr val="A5335F"/>
                 </a:solidFill>
                 <a:latin typeface="Verdana"/>
               </a:rPr>
@@ -14197,7 +14197,7 @@
             </a:avLst>
           </a:prstGeom>
           <a:solidFill>
-            <a:srgbClr val="E3F1E7"/>
+            <a:srgbClr val="FCE9F0"/>
           </a:solidFill>
           <a:ln>
             <a:noFill/>
@@ -14254,7 +14254,7 @@
             <a:r>
               <a:rPr sz="1500" b="1" i="0">
                 <a:solidFill>
-                  <a:srgbClr val="166534"/>
+                  <a:srgbClr val="A5335F"/>
                 </a:solidFill>
                 <a:latin typeface="Verdana"/>
               </a:rPr>
@@ -14470,7 +14470,7 @@
             <a:r>
               <a:rPr sz="1300" b="1" i="0" spc="156">
                 <a:solidFill>
-                  <a:srgbClr val="166534"/>
+                  <a:srgbClr val="A5335F"/>
                 </a:solidFill>
                 <a:latin typeface="Verdana"/>
               </a:rPr>
@@ -14620,7 +14620,7 @@
             </a:avLst>
           </a:prstGeom>
           <a:solidFill>
-            <a:srgbClr val="E3F1E7"/>
+            <a:srgbClr val="FCE9F0"/>
           </a:solidFill>
           <a:ln>
             <a:noFill/>
@@ -14677,7 +14677,7 @@
             <a:r>
               <a:rPr sz="1500" b="1" i="0">
                 <a:solidFill>
-                  <a:srgbClr val="166534"/>
+                  <a:srgbClr val="A5335F"/>
                 </a:solidFill>
                 <a:latin typeface="Verdana"/>
               </a:rPr>
@@ -14797,7 +14797,7 @@
             </a:avLst>
           </a:prstGeom>
           <a:solidFill>
-            <a:srgbClr val="E3F1E7"/>
+            <a:srgbClr val="FCE9F0"/>
           </a:solidFill>
           <a:ln>
             <a:noFill/>
@@ -14854,7 +14854,7 @@
             <a:r>
               <a:rPr sz="1500" b="1" i="0">
                 <a:solidFill>
-                  <a:srgbClr val="166534"/>
+                  <a:srgbClr val="A5335F"/>
                 </a:solidFill>
                 <a:latin typeface="Verdana"/>
               </a:rPr>
@@ -14974,7 +14974,7 @@
             </a:avLst>
           </a:prstGeom>
           <a:solidFill>
-            <a:srgbClr val="E3F1E7"/>
+            <a:srgbClr val="FCE9F0"/>
           </a:solidFill>
           <a:ln>
             <a:noFill/>
@@ -15031,7 +15031,7 @@
             <a:r>
               <a:rPr sz="1500" b="1" i="0">
                 <a:solidFill>
-                  <a:srgbClr val="166534"/>
+                  <a:srgbClr val="A5335F"/>
                 </a:solidFill>
                 <a:latin typeface="Verdana"/>
               </a:rPr>
@@ -15151,7 +15151,7 @@
             </a:avLst>
           </a:prstGeom>
           <a:solidFill>
-            <a:srgbClr val="E3F1E7"/>
+            <a:srgbClr val="FCE9F0"/>
           </a:solidFill>
           <a:ln>
             <a:noFill/>
@@ -15208,7 +15208,7 @@
             <a:r>
               <a:rPr sz="1500" b="1" i="0">
                 <a:solidFill>
-                  <a:srgbClr val="166534"/>
+                  <a:srgbClr val="A5335F"/>
                 </a:solidFill>
                 <a:latin typeface="Verdana"/>
               </a:rPr>
@@ -15328,7 +15328,7 @@
             </a:avLst>
           </a:prstGeom>
           <a:solidFill>
-            <a:srgbClr val="E3F1E7"/>
+            <a:srgbClr val="FCE9F0"/>
           </a:solidFill>
           <a:ln>
             <a:noFill/>
@@ -15385,7 +15385,7 @@
             <a:r>
               <a:rPr sz="1500" b="1" i="0">
                 <a:solidFill>
-                  <a:srgbClr val="166534"/>
+                  <a:srgbClr val="A5335F"/>
                 </a:solidFill>
                 <a:latin typeface="Verdana"/>
               </a:rPr>
@@ -15610,7 +15610,7 @@
             <a:r>
               <a:rPr sz="1300" b="1" i="0" spc="156">
                 <a:solidFill>
-                  <a:srgbClr val="166534"/>
+                  <a:srgbClr val="A5335F"/>
                 </a:solidFill>
                 <a:latin typeface="Verdana"/>
               </a:rPr>
@@ -15760,7 +15760,7 @@
             </a:avLst>
           </a:prstGeom>
           <a:solidFill>
-            <a:srgbClr val="E3F1E7"/>
+            <a:srgbClr val="FCE9F0"/>
           </a:solidFill>
           <a:ln>
             <a:noFill/>
@@ -15817,7 +15817,7 @@
             <a:r>
               <a:rPr sz="1500" b="1" i="0">
                 <a:solidFill>
-                  <a:srgbClr val="166534"/>
+                  <a:srgbClr val="A5335F"/>
                 </a:solidFill>
                 <a:latin typeface="Verdana"/>
               </a:rPr>
@@ -15928,7 +15928,7 @@
             </a:avLst>
           </a:prstGeom>
           <a:solidFill>
-            <a:srgbClr val="E3F1E7"/>
+            <a:srgbClr val="FCE9F0"/>
           </a:solidFill>
           <a:ln>
             <a:noFill/>
@@ -15985,7 +15985,7 @@
             <a:r>
               <a:rPr sz="1500" b="1" i="0">
                 <a:solidFill>
-                  <a:srgbClr val="166534"/>
+                  <a:srgbClr val="A5335F"/>
                 </a:solidFill>
                 <a:latin typeface="Verdana"/>
               </a:rPr>
@@ -16096,7 +16096,7 @@
             </a:avLst>
           </a:prstGeom>
           <a:solidFill>
-            <a:srgbClr val="E3F1E7"/>
+            <a:srgbClr val="FCE9F0"/>
           </a:solidFill>
           <a:ln>
             <a:noFill/>
@@ -16153,7 +16153,7 @@
             <a:r>
               <a:rPr sz="1500" b="1" i="0">
                 <a:solidFill>
-                  <a:srgbClr val="166534"/>
+                  <a:srgbClr val="A5335F"/>
                 </a:solidFill>
                 <a:latin typeface="Verdana"/>
               </a:rPr>
@@ -16264,7 +16264,7 @@
             </a:avLst>
           </a:prstGeom>
           <a:solidFill>
-            <a:srgbClr val="E3F1E7"/>
+            <a:srgbClr val="FCE9F0"/>
           </a:solidFill>
           <a:ln>
             <a:noFill/>
@@ -16321,7 +16321,7 @@
             <a:r>
               <a:rPr sz="1500" b="1" i="0">
                 <a:solidFill>
-                  <a:srgbClr val="166534"/>
+                  <a:srgbClr val="A5335F"/>
                 </a:solidFill>
                 <a:latin typeface="Verdana"/>
               </a:rPr>
@@ -16432,7 +16432,7 @@
             </a:avLst>
           </a:prstGeom>
           <a:solidFill>
-            <a:srgbClr val="E3F1E7"/>
+            <a:srgbClr val="FCE9F0"/>
           </a:solidFill>
           <a:ln>
             <a:noFill/>
@@ -16489,7 +16489,7 @@
             <a:r>
               <a:rPr sz="1500" b="1" i="0">
                 <a:solidFill>
-                  <a:srgbClr val="166534"/>
+                  <a:srgbClr val="A5335F"/>
                 </a:solidFill>
                 <a:latin typeface="Verdana"/>
               </a:rPr>
